--- a/Fluctus_Laadplan_Lens.pptx
+++ b/Fluctus_Laadplan_Lens.pptx
@@ -22558,7 +22558,46 @@
       </p:sp>
       <p:sp>
         <p:nvSpPr>
-          <p:cNvPr id="439" name="Shape 437"/>
+          <p:cNvPr id="439" name="Text 437"/>
+          <p:cNvSpPr/>
+          <p:nvPr/>
+        </p:nvSpPr>
+        <p:spPr>
+          <a:xfrm>
+            <a:off x="640080" y="6071616"/>
+            <a:ext cx="10058400" cy="237744"/>
+          </a:xfrm>
+          <a:prstGeom prst="rect">
+            <a:avLst/>
+          </a:prstGeom>
+          <a:noFill/>
+          <a:ln/>
+        </p:spPr>
+        <p:txBody>
+          <a:bodyPr wrap="square" lIns="0" tIns="0" rIns="0" bIns="0" rtlCol="0" anchor="ctr"/>
+          <a:lstStyle/>
+          <a:p>
+            <a:pPr indent="0" marL="0">
+              <a:buNone/>
+            </a:pPr>
+            <a:r>
+              <a:rPr lang="en-US" sz="800" i="1" dirty="0">
+                <a:solidFill>
+                  <a:srgbClr val="5A6473"/>
+                </a:solidFill>
+                <a:latin typeface="Arial" pitchFamily="34" charset="0"/>
+                <a:ea typeface="Arial" pitchFamily="34" charset="-122"/>
+                <a:cs typeface="Arial" pitchFamily="34" charset="-120"/>
+              </a:rPr>
+              <a:t>Bron bestaande laadpunten: Departement Mobiliteit en Openbare Werken (Vlaanderen).</a:t>
+            </a:r>
+            <a:endParaRPr lang="en-US" sz="800" dirty="0"/>
+          </a:p>
+        </p:txBody>
+      </p:sp>
+      <p:sp>
+        <p:nvSpPr>
+          <p:cNvPr id="440" name="Shape 438"/>
           <p:cNvSpPr/>
           <p:nvPr/>
         </p:nvSpPr>
@@ -22578,7 +22617,7 @@
       </p:sp>
       <p:pic>
         <p:nvPicPr>
-          <p:cNvPr id="440" name="Image 0" descr="preencoded.png">    </p:cNvPr>
+          <p:cNvPr id="441" name="Image 0" descr="preencoded.png">    </p:cNvPr>
           <p:cNvPicPr>
             <a:picLocks noChangeAspect="1"/>
           </p:cNvPicPr>
@@ -22602,7 +22641,7 @@
       </p:pic>
       <p:sp>
         <p:nvSpPr>
-          <p:cNvPr id="441" name="Text 438"/>
+          <p:cNvPr id="442" name="Text 439"/>
           <p:cNvSpPr/>
           <p:nvPr/>
         </p:nvSpPr>
@@ -22644,7 +22683,7 @@
       </p:sp>
       <p:sp>
         <p:nvSpPr>
-          <p:cNvPr id="442" name="Shape 439"/>
+          <p:cNvPr id="443" name="Shape 440"/>
           <p:cNvSpPr/>
           <p:nvPr/>
         </p:nvSpPr>
@@ -22664,7 +22703,7 @@
       </p:sp>
       <p:pic>
         <p:nvPicPr>
-          <p:cNvPr id="443" name="Image 1" descr="preencoded.png">    </p:cNvPr>
+          <p:cNvPr id="444" name="Image 1" descr="preencoded.png">    </p:cNvPr>
           <p:cNvPicPr>
             <a:picLocks noChangeAspect="1"/>
           </p:cNvPicPr>
@@ -22688,7 +22727,7 @@
       </p:pic>
       <p:sp>
         <p:nvSpPr>
-          <p:cNvPr id="444" name="Text 440"/>
+          <p:cNvPr id="445" name="Text 441"/>
           <p:cNvSpPr/>
           <p:nvPr/>
         </p:nvSpPr>
@@ -22730,7 +22769,7 @@
       </p:sp>
       <p:sp>
         <p:nvSpPr>
-          <p:cNvPr id="445" name="Shape 441"/>
+          <p:cNvPr id="446" name="Shape 442"/>
           <p:cNvSpPr/>
           <p:nvPr/>
         </p:nvSpPr>
@@ -22750,7 +22789,7 @@
       </p:sp>
       <p:pic>
         <p:nvPicPr>
-          <p:cNvPr id="446" name="Image 2" descr="preencoded.png">    </p:cNvPr>
+          <p:cNvPr id="447" name="Image 2" descr="preencoded.png">    </p:cNvPr>
           <p:cNvPicPr>
             <a:picLocks noChangeAspect="1"/>
           </p:cNvPicPr>
@@ -22774,7 +22813,7 @@
       </p:pic>
       <p:sp>
         <p:nvSpPr>
-          <p:cNvPr id="447" name="Text 442"/>
+          <p:cNvPr id="448" name="Text 443"/>
           <p:cNvSpPr/>
           <p:nvPr/>
         </p:nvSpPr>
@@ -22816,7 +22855,7 @@
       </p:sp>
       <p:sp>
         <p:nvSpPr>
-          <p:cNvPr id="448" name="Text 443"/>
+          <p:cNvPr id="449" name="Text 444"/>
           <p:cNvSpPr/>
           <p:nvPr/>
         </p:nvSpPr>
@@ -22855,7 +22894,7 @@
       </p:sp>
       <p:sp>
         <p:nvSpPr>
-          <p:cNvPr id="449" name="Text 444"/>
+          <p:cNvPr id="450" name="Text 445"/>
           <p:cNvSpPr/>
           <p:nvPr/>
         </p:nvSpPr>
